--- a/week-02/presentations/ppts/day-05-customer-journey-mapping.pptx
+++ b/week-02/presentations/ppts/day-05-customer-journey-mapping.pptx
@@ -7830,43 +7830,7 @@
             </a:pPr>
             <a:r>
               <a:rPr/>
-              <a:t>1. Stage — Phases of the journey (5–8 stages)</a:t>
-            </a:r>
-          </a:p>
-          <a:p>
-            <a:pPr lvl="0" indent="0" marL="0">
-              <a:buNone/>
-            </a:pPr>
-            <a:r>
-              <a:rPr/>
-              <a:t>2. Actions — Concrete verbs the user is doing</a:t>
-            </a:r>
-          </a:p>
-          <a:p>
-            <a:pPr lvl="0" indent="0" marL="0">
-              <a:buNone/>
-            </a:pPr>
-            <a:r>
-              <a:rPr/>
-              <a:t>3. Thoughts — Quotes from interviews where possible</a:t>
-            </a:r>
-          </a:p>
-          <a:p>
-            <a:pPr lvl="0" indent="0" marL="0">
-              <a:buNone/>
-            </a:pPr>
-            <a:r>
-              <a:rPr/>
-              <a:t>4. Emotions — 4-point curve, plotted</a:t>
-            </a:r>
-          </a:p>
-          <a:p>
-            <a:pPr lvl="0" indent="0" marL="0">
-              <a:buNone/>
-            </a:pPr>
-            <a:r>
-              <a:rPr/>
-              <a:t>5. Touchpoints — Every system &amp; person; star the friction</a:t>
+              <a:t>1. Stage — Phases of the journey (5–8 stages) 2. Actions — Concrete verbs the user is doing 3. Thoughts — Quotes from interviews where possible 4. Emotions — 4-point curve, plotted 5. Touchpoints — Every system &amp; person; star the friction</a:t>
             </a:r>
           </a:p>
           <a:p>

--- a/week-02/presentations/ppts/day-05-customer-journey-mapping.pptx
+++ b/week-02/presentations/ppts/day-05-customer-journey-mapping.pptx
@@ -5301,7 +5301,7 @@
             </a:pPr>
             <a:r>
               <a:rPr/>
-              <a:t>🗽️ Mapping Customer Journeys to Features</a:t>
+              <a:t>🗺️ Mapping Customer Journeys to Features</a:t>
             </a:r>
           </a:p>
         </p:txBody>

--- a/week-02/presentations/ppts/day-05-customer-journey-mapping.pptx
+++ b/week-02/presentations/ppts/day-05-customer-journey-mapping.pptx
@@ -5448,7 +5448,7 @@
             </a:pPr>
             <a:r>
               <a:rPr/>
-              <a:t>For every stage, list every system or person the user interacts with — including paper, phone, other software, manager, customer.</a:t>
+              <a:t>For every stage, list every system or person involved — paper, phone, other software, manager, customer.</a:t>
             </a:r>
           </a:p>
           <a:p>
@@ -5484,15 +5484,6 @@
             </a:pPr>
             <a:r>
               <a:rPr/>
-              <a:t>Misses the actual journey.</a:t>
-            </a:r>
-          </a:p>
-          <a:p>
-            <a:pPr lvl="0" indent="0" marL="0">
-              <a:buNone/>
-            </a:pPr>
-            <a:r>
-              <a:rPr/>
               <a:t>✅ Honest map</a:t>
             </a:r>
           </a:p>
@@ -5511,25 +5502,16 @@
             </a:pPr>
             <a:r>
               <a:rPr/>
-              <a:t>Touchpoints: FieldPulse mobile, paper ticket book, tech’s phone, owner’s spreadsheet, the printer that jammed</a:t>
-            </a:r>
-          </a:p>
-          <a:p>
-            <a:pPr lvl="0" indent="0" marL="0">
-              <a:buNone/>
-            </a:pPr>
-            <a:r>
-              <a:rPr/>
-              <a:t>Surfaces the integration story.</a:t>
-            </a:r>
-          </a:p>
-          <a:p>
-            <a:pPr lvl="0" indent="0" marL="0">
-              <a:buNone/>
-            </a:pPr>
-            <a:r>
-              <a:rPr/>
-              <a:t>Bridge to Week 4: non-product touchpoints become the input to system-component mapping in Week 4.</a:t>
+              <a:t>Touchpoints: FieldPulse mobile, paper tickets, tech’s phone, owner’s spreadsheet, the jammed printer</a:t>
+            </a:r>
+          </a:p>
+          <a:p>
+            <a:pPr lvl="0" indent="0" marL="0">
+              <a:buNone/>
+            </a:pPr>
+            <a:r>
+              <a:rPr/>
+              <a:t>Bridge to Week 4: these touchpoints feed system-component mapping.</a:t>
             </a:r>
           </a:p>
         </p:txBody>

--- a/week-02/presentations/ppts/day-05-customer-journey-mapping.pptx
+++ b/week-02/presentations/ppts/day-05-customer-journey-mapping.pptx
@@ -5967,7 +5967,7 @@
             </a:pPr>
             <a:r>
               <a:rPr/>
-              <a:t>The recurring failure: features without metric links. Force the link or kill the feature.</a:t>
+              <a:t>The recurring failure: features without metric links — no key performance indicator (KPI) or operational signal moved. Force the link or kill the feature.</a:t>
             </a:r>
           </a:p>
         </p:txBody>
@@ -7068,16 +7068,16 @@
             </a:pPr>
             <a:r>
               <a:rPr/>
-              <a:t>Convert your top feature concept → full Technical PRD (non-AI)</a:t>
-            </a:r>
-          </a:p>
-          <a:p>
-            <a:pPr lvl="0" indent="0" marL="0">
-              <a:buNone/>
-            </a:pPr>
-            <a:r>
-              <a:rPr/>
-              <a:t>Acceptance Criteria, NFRs, peer-review cycle</a:t>
+              <a:t>Convert your top feature concept → full Product Requirements Document (PRD) (non-AI)</a:t>
+            </a:r>
+          </a:p>
+          <a:p>
+            <a:pPr lvl="0" indent="0" marL="0">
+              <a:buNone/>
+            </a:pPr>
+            <a:r>
+              <a:rPr/>
+              <a:t>Acceptance Criteria, non-functional requirements (NFRs), peer-review cycle</a:t>
             </a:r>
           </a:p>
           <a:p>

--- a/week-02/presentations/ppts/day-05-customer-journey-mapping.pptx
+++ b/week-02/presentations/ppts/day-05-customer-journey-mapping.pptx
@@ -6033,6 +6033,23 @@
         <p:txBody>
           <a:bodyPr/>
           <a:lstStyle/>
+          <a:p>
+            <a:pPr lvl="0" indent="0">
+              <a:buNone/>
+            </a:pPr>
+            <a:r>
+              <a:rPr>
+                <a:latin typeface="Courier"/>
+              </a:rPr>
+              <a:t>## Feature concept: &lt;name&gt;
+**Stage(s) addressed:** &lt;journey stages&gt;
+**Friction reduced:** &lt;specific friction starred on the map&gt;
+**Metric it moves:** &lt;op-signal or KPI&gt;
+**Aligned principle:** &lt;which of the 3&gt;
+**Trade-off / risk:** &lt;what we'd give up; what could go wrong&gt;
+**Validation:** how would we know it actually moved the metric in 30 days?</a:t>
+            </a:r>
+          </a:p>
           <a:p>
             <a:pPr lvl="0" indent="0" marL="0">
               <a:buNone/>

--- a/week-02/presentations/ppts/day-05-customer-journey-mapping.pptx
+++ b/week-02/presentations/ppts/day-05-customer-journey-mapping.pptx
@@ -628,7 +628,7 @@
             </a:pPr>
             <a:r>
               <a:rPr/>
-              <a:t>Most triads will want to map only their own product. Force the question: “What else is in their hand?”</a:t>
+              <a:t>Most quads will want to map only their own product. Force the question: “What else is in their hand?”</a:t>
             </a:r>
           </a:p>
         </p:txBody>
@@ -792,7 +792,7 @@
             </a:pPr>
             <a:r>
               <a:rPr/>
-              <a:t>Hand each triad a marker for friction stars. Physicality of starring forces commitment.</a:t>
+              <a:t>Hand each quad a marker for friction stars. Physicality of starring forces commitment.</a:t>
             </a:r>
           </a:p>
         </p:txBody>
@@ -1120,7 +1120,7 @@
             </a:pPr>
             <a:r>
               <a:rPr/>
-              <a:t>If a triad’s 3 features all hit the same stage, ask whether that stage really is 80% of the friction. Force a defense.</a:t>
+              <a:t>If a quad’s 3 features all hit the same stage, ask whether that stage really is 80% of the friction. Force a defense.</a:t>
             </a:r>
           </a:p>
         </p:txBody>
@@ -1284,7 +1284,7 @@
             </a:pPr>
             <a:r>
               <a:rPr/>
-              <a:t>Time is enforced. The clock matters. Triads who blow their time get docked on coherence.</a:t>
+              <a:t>Time is enforced. The clock matters. Quads who blow their time get docked on coherence.</a:t>
             </a:r>
           </a:p>
         </p:txBody>
@@ -1530,7 +1530,7 @@
             </a:pPr>
             <a:r>
               <a:rPr/>
-              <a:t>If a triad is way under-rehearsed, give them an extra 10 minutes by trimming the predict step. Rehearsal is the most-skipped step and the most predictive of readout quality.</a:t>
+              <a:t>If a quad is way under-rehearsed, give them an extra 10 minutes by trimming the predict step. Rehearsal is the most-skipped step and the most predictive of readout quality.</a:t>
             </a:r>
           </a:p>
         </p:txBody>
@@ -1612,7 +1612,7 @@
             </a:pPr>
             <a:r>
               <a:rPr/>
-              <a:t>Round-robin close: each triad names the </a:t>
+              <a:t>Round-robin close: each quad names the </a:t>
             </a:r>
             <a:r>
               <a:rPr i="1"/>
@@ -1866,7 +1866,7 @@
             </a:pPr>
             <a:r>
               <a:rPr/>
-              <a:t>Most triads will be tempted to map the product, not the user. Coach against it from this slide forward.</a:t>
+              <a:t>Most quads will be tempted to map the product, not the user. Coach against it from this slide forward.</a:t>
             </a:r>
           </a:p>
         </p:txBody>
@@ -1948,7 +1948,7 @@
             </a:pPr>
             <a:r>
               <a:rPr/>
-              <a:t>The most common rookie mistake is mapping the product, not the user. Every triad will be tempted. Coach against it.</a:t>
+              <a:t>The most common rookie mistake is mapping the product, not the user. Every quad will be tempted. Coach against it.</a:t>
             </a:r>
           </a:p>
         </p:txBody>
@@ -2112,7 +2112,7 @@
             </a:pPr>
             <a:r>
               <a:rPr/>
-              <a:t>If a triad picks “all journeys” — push back hard. Specificity is where insight lives.</a:t>
+              <a:t>If a quad picks “all journeys” — push back hard. Specificity is where insight lives.</a:t>
             </a:r>
           </a:p>
         </p:txBody>
@@ -5685,7 +5685,7 @@
             </a:pPr>
             <a:r>
               <a:rPr b="1"/>
-              <a:t>Triads • 40 minutes</a:t>
+              <a:t>Quads • 40 minutes</a:t>
             </a:r>
           </a:p>
           <a:p>
@@ -6131,7 +6131,7 @@
             </a:pPr>
             <a:r>
               <a:rPr b="1"/>
-              <a:t>Triads • 40 minutes</a:t>
+              <a:t>Quads • 40 minutes</a:t>
             </a:r>
           </a:p>
           <a:p>
@@ -6485,7 +6485,7 @@
             </a:pPr>
             <a:r>
               <a:rPr/>
-              <a:t>All three voices speak. No single triad-spokesperson. Engineering judges lecturers harshly.</a:t>
+              <a:t>All three voices speak. No single quad-spokesperson. Engineering judges lecturers harshly.</a:t>
             </a:r>
           </a:p>
         </p:txBody>
@@ -6887,7 +6887,7 @@
             </a:pPr>
             <a:r>
               <a:rPr b="1"/>
-              <a:t>Triads • 12 min present + 3 min Q&amp;A each</a:t>
+              <a:t>Quads • 12 min present + 3 min Q&amp;A each</a:t>
             </a:r>
           </a:p>
           <a:p>
@@ -7040,7 +7040,7 @@
             </a:pPr>
             <a:r>
               <a:rPr/>
-              <a:t>3 design principles per triad</a:t>
+              <a:t>3 design principles per quad</a:t>
             </a:r>
           </a:p>
           <a:p>
@@ -7838,7 +7838,7 @@
             </a:pPr>
             <a:r>
               <a:rPr/>
-              <a:t>Watch: the emotions curve must not be flat. A flat curve means the triad is sanitizing.</a:t>
+              <a:t>Watch: the emotions curve must not be flat. A flat curve means the quad is sanitizing.</a:t>
             </a:r>
           </a:p>
         </p:txBody>
@@ -8039,7 +8039,7 @@
             </a:pPr>
             <a:r>
               <a:rPr b="1"/>
-              <a:t>Triads • 35 minutes</a:t>
+              <a:t>Quads • 35 minutes</a:t>
             </a:r>
           </a:p>
           <a:p>

--- a/week-02/presentations/ppts/day-05-customer-journey-mapping.pptx
+++ b/week-02/presentations/ppts/day-05-customer-journey-mapping.pptx
@@ -5685,7 +5685,7 @@
             </a:pPr>
             <a:r>
               <a:rPr b="1"/>
-              <a:t>Quads • 40 minutes</a:t>
+              <a:t>Quads • 50 minutes</a:t>
             </a:r>
           </a:p>
           <a:p>
@@ -6131,7 +6131,7 @@
             </a:pPr>
             <a:r>
               <a:rPr b="1"/>
-              <a:t>Quads • 40 minutes</a:t>
+              <a:t>Quads • 50 minutes</a:t>
             </a:r>
           </a:p>
           <a:p>
@@ -8039,7 +8039,7 @@
             </a:pPr>
             <a:r>
               <a:rPr b="1"/>
-              <a:t>Quads • 35 minutes</a:t>
+              <a:t>Quads • 45 minutes</a:t>
             </a:r>
           </a:p>
           <a:p>

--- a/week-02/presentations/ppts/day-05-customer-journey-mapping.pptx
+++ b/week-02/presentations/ppts/day-05-customer-journey-mapping.pptx
@@ -5721,7 +5721,7 @@
             </a:pPr>
             <a:r>
               <a:rPr/>
-              <a:t>15 min: touchpoints (include non-product)</a:t>
+              <a:t>25 min: touchpoints (include non-product)</a:t>
             </a:r>
           </a:p>
           <a:p>
@@ -6149,7 +6149,7 @@
             </a:pPr>
             <a:r>
               <a:rPr/>
-              <a:t>15 min: brainstorm (volume first)</a:t>
+              <a:t>25 min: brainstorm (volume first)</a:t>
             </a:r>
           </a:p>
           <a:p>
@@ -8075,7 +8075,7 @@
             </a:pPr>
             <a:r>
               <a:rPr/>
-              <a:t>15 min: stage the journey on the canvas</a:t>
+              <a:t>25 min: stage the journey on the canvas</a:t>
             </a:r>
           </a:p>
           <a:p>
